--- a/Presentation/Presentation1.pptx
+++ b/Presentation/Presentation1.pptx
@@ -146,13 +146,13 @@
               </a:defRPr>
             </a:pPr>
             <a:r>
-              <a:rPr lang="en-US" sz="1200" b="0" i="0" u="none" strike="noStrike">
+              <a:rPr lang="en-US" sz="1200" b="0" i="0" u="none" strike="noStrike" dirty="0">
                 <a:solidFill>
                   <a:srgbClr val="64748B"/>
                 </a:solidFill>
                 <a:latin typeface="Arial"/>
               </a:rPr>
-              <a:t>R² Score Comparison (update with your actual values)</a:t>
+              <a:t>R² Score Comparison </a:t>
             </a:r>
           </a:p>
         </c:rich>
@@ -230,6 +230,100 @@
             </c:extLst>
           </c:dPt>
           <c:dLbls>
+            <c:dLbl>
+              <c:idx val="0"/>
+              <c:tx>
+                <c:rich>
+                  <a:bodyPr/>
+                  <a:lstStyle/>
+                  <a:p>
+                    <a:r>
+                      <a:rPr lang="en-US"/>
+                      <a:t>-0.02</a:t>
+                    </a:r>
+                  </a:p>
+                </c:rich>
+              </c:tx>
+              <c:showLegendKey val="0"/>
+              <c:showVal val="1"/>
+              <c:showCatName val="0"/>
+              <c:showSerName val="0"/>
+              <c:showPercent val="0"/>
+              <c:showBubbleSize val="0"/>
+              <c:extLst>
+                <c:ext xmlns:c15="http://schemas.microsoft.com/office/drawing/2012/chart" uri="{CE6537A1-D6FC-4f65-9D91-7224C49458BB}">
+                  <c15:showDataLabelsRange val="0"/>
+                </c:ext>
+                <c:ext xmlns:c16="http://schemas.microsoft.com/office/drawing/2014/chart" uri="{C3380CC4-5D6E-409C-BE32-E72D297353CC}">
+                  <c16:uniqueId val="{00000001-C935-4527-861D-FC756D0E247C}"/>
+                </c:ext>
+              </c:extLst>
+            </c:dLbl>
+            <c:dLbl>
+              <c:idx val="1"/>
+              <c:tx>
+                <c:rich>
+                  <a:bodyPr/>
+                  <a:lstStyle/>
+                  <a:p>
+                    <a:r>
+                      <a:rPr lang="en-US"/>
+                      <a:t>-0.19</a:t>
+                    </a:r>
+                  </a:p>
+                </c:rich>
+              </c:tx>
+              <c:showLegendKey val="0"/>
+              <c:showVal val="1"/>
+              <c:showCatName val="0"/>
+              <c:showSerName val="0"/>
+              <c:showPercent val="0"/>
+              <c:showBubbleSize val="0"/>
+              <c:extLst>
+                <c:ext xmlns:c15="http://schemas.microsoft.com/office/drawing/2012/chart" uri="{CE6537A1-D6FC-4f65-9D91-7224C49458BB}">
+                  <c15:showDataLabelsRange val="0"/>
+                </c:ext>
+                <c:ext xmlns:c16="http://schemas.microsoft.com/office/drawing/2014/chart" uri="{C3380CC4-5D6E-409C-BE32-E72D297353CC}">
+                  <c16:uniqueId val="{00000003-C935-4527-861D-FC756D0E247C}"/>
+                </c:ext>
+              </c:extLst>
+            </c:dLbl>
+            <c:dLbl>
+              <c:idx val="2"/>
+              <c:tx>
+                <c:rich>
+                  <a:bodyPr/>
+                  <a:lstStyle/>
+                  <a:p>
+                    <a:r>
+                      <a:rPr lang="en-US" dirty="0"/>
+                      <a:t>-0.57</a:t>
+                    </a:r>
+                    <a:fld id="{3CD4E252-990D-49C5-A722-0125C1935A3D}" type="VALUE">
+                      <a:rPr lang="en-US" smtClean="0"/>
+                      <a:pPr/>
+                      <a:t>[VALUE]</a:t>
+                    </a:fld>
+                    <a:endParaRPr lang="en-US" dirty="0"/>
+                  </a:p>
+                </c:rich>
+              </c:tx>
+              <c:showLegendKey val="0"/>
+              <c:showVal val="1"/>
+              <c:showCatName val="0"/>
+              <c:showSerName val="0"/>
+              <c:showPercent val="0"/>
+              <c:showBubbleSize val="0"/>
+              <c:extLst>
+                <c:ext xmlns:c15="http://schemas.microsoft.com/office/drawing/2012/chart" uri="{CE6537A1-D6FC-4f65-9D91-7224C49458BB}">
+                  <c15:dlblFieldTable/>
+                  <c15:showDataLabelsRange val="0"/>
+                </c:ext>
+                <c:ext xmlns:c16="http://schemas.microsoft.com/office/drawing/2014/chart" uri="{C3380CC4-5D6E-409C-BE32-E72D297353CC}">
+                  <c16:uniqueId val="{00000005-C935-4527-861D-FC756D0E247C}"/>
+                </c:ext>
+              </c:extLst>
+            </c:dLbl>
             <c:numFmt formatCode="#,##0" sourceLinked="0"/>
             <c:spPr>
               <a:noFill/>
@@ -290,13 +384,13 @@
                 <c:formatCode>General</c:formatCode>
                 <c:ptCount val="3"/>
                 <c:pt idx="0">
-                  <c:v>0.72</c:v>
+                  <c:v>-0.02</c:v>
                 </c:pt>
                 <c:pt idx="1">
-                  <c:v>0.91</c:v>
+                  <c:v>-0.19</c:v>
                 </c:pt>
                 <c:pt idx="2">
-                  <c:v>0.88</c:v>
+                  <c:v>-0.56999999999999995</c:v>
                 </c:pt>
               </c:numCache>
             </c:numRef>
@@ -4147,9 +4241,7 @@
           <a:bodyPr wrap="square" rtlCol="0" anchor="ctr"/>
           <a:lstStyle/>
           <a:p>
-            <a:pPr marL="0" indent="0" algn="ctr">
-              <a:buNone/>
-            </a:pPr>
+            <a:pPr algn="ctr"/>
             <a:r>
               <a:rPr lang="en-US" sz="1200" dirty="0">
                 <a:solidFill>
@@ -4159,7 +4251,7 @@
                 <a:ea typeface="Arial" pitchFamily="34" charset="-122"/>
                 <a:cs typeface="Arial" pitchFamily="34" charset="-120"/>
               </a:rPr>
-              <a:t>GitHub: [your github link here]</a:t>
+              <a:t>GitHub: https://github.com/sanskarkumar333222-dot</a:t>
             </a:r>
             <a:endParaRPr lang="en-US" sz="1200" dirty="0"/>
           </a:p>
@@ -10975,14 +11067,14 @@
           <p:nvPr>
             <p:extLst>
               <p:ext uri="{D42A27DB-BD31-4B8C-83A1-F6EECF244321}">
-                <p14:modId xmlns:p14="http://schemas.microsoft.com/office/powerpoint/2010/main" val="1579011935"/>
+                <p14:modId xmlns:p14="http://schemas.microsoft.com/office/powerpoint/2010/main" val="3208396366"/>
               </p:ext>
             </p:extLst>
           </p:nvPr>
         </p:nvGraphicFramePr>
         <p:xfrm>
           <a:off x="365760" y="960120"/>
-          <a:ext cx="8412480" cy="1944624"/>
+          <a:ext cx="8412480" cy="1911096"/>
         </p:xfrm>
         <a:graphic>
           <a:graphicData uri="http://schemas.openxmlformats.org/drawingml/2006/table">
@@ -11297,7 +11389,7 @@
                   </a:ext>
                 </a:extLst>
               </a:tr>
-              <a:tr h="475488">
+              <a:tr h="484632">
                 <a:tc>
                   <a:txBody>
                     <a:bodyPr/>
@@ -11377,10 +11469,10 @@
                             <a:srgbClr val="1A2E4A"/>
                           </a:solidFill>
                           <a:latin typeface="Arial" pitchFamily="34" charset="0"/>
-                          <a:ea typeface="Arial" pitchFamily="34" charset="-122"/>
+                          <a:ea typeface="Arial" charset="0"/>
                           <a:cs typeface="Arial" pitchFamily="34" charset="-120"/>
                         </a:rPr>
-                        <a:t>Fill from notebook</a:t>
+                        <a:t>8.06</a:t>
                       </a:r>
                       <a:endParaRPr lang="en-US" sz="1400" dirty="0">
                         <a:latin typeface="Arial" charset="0"/>
@@ -11442,10 +11534,10 @@
                             <a:srgbClr val="1A2E4A"/>
                           </a:solidFill>
                           <a:latin typeface="Arial" pitchFamily="34" charset="0"/>
-                          <a:ea typeface="Arial" pitchFamily="34" charset="-122"/>
+                          <a:ea typeface="Arial" charset="0"/>
                           <a:cs typeface="Arial" pitchFamily="34" charset="-120"/>
                         </a:rPr>
-                        <a:t>Fill from notebook</a:t>
+                        <a:t>9.57</a:t>
                       </a:r>
                       <a:endParaRPr lang="en-US" sz="1400" dirty="0">
                         <a:latin typeface="Arial" charset="0"/>
@@ -11507,10 +11599,10 @@
                             <a:srgbClr val="1A2E4A"/>
                           </a:solidFill>
                           <a:latin typeface="Arial" pitchFamily="34" charset="0"/>
-                          <a:ea typeface="Arial" pitchFamily="34" charset="-122"/>
+                          <a:ea typeface="Arial" charset="0"/>
                           <a:cs typeface="Arial" pitchFamily="34" charset="-120"/>
                         </a:rPr>
-                        <a:t>Fill from notebook</a:t>
+                        <a:t>-0.02</a:t>
                       </a:r>
                       <a:endParaRPr lang="en-US" sz="1400" dirty="0">
                         <a:latin typeface="Arial" charset="0"/>
@@ -11644,16 +11736,73 @@
                             <a:srgbClr val="1A2E4A"/>
                           </a:solidFill>
                           <a:latin typeface="Arial" pitchFamily="34" charset="0"/>
-                          <a:ea typeface="Arial" pitchFamily="34" charset="-122"/>
+                          <a:ea typeface="Arial" charset="0"/>
                           <a:cs typeface="Arial" pitchFamily="34" charset="-120"/>
                         </a:rPr>
-                        <a:t>Fill from notebook</a:t>
+                        <a:t>8.66</a:t>
                       </a:r>
                       <a:endParaRPr lang="en-US" sz="1400" dirty="0">
                         <a:latin typeface="Arial" charset="0"/>
                         <a:ea typeface="Arial" charset="0"/>
                         <a:cs typeface="Arial" charset="0"/>
                       </a:endParaRPr>
+                    </a:p>
+                  </a:txBody>
+                  <a:tcPr>
+                    <a:lnL w="12700" cap="flat" cmpd="sng" algn="ctr">
+                      <a:solidFill>
+                        <a:srgbClr val="C8D8E8"/>
+                      </a:solidFill>
+                      <a:prstDash val="solid"/>
+                      <a:round/>
+                      <a:headEnd type="none" w="med" len="med"/>
+                      <a:tailEnd type="none" w="med" len="med"/>
+                    </a:lnL>
+                    <a:lnR w="12700" cap="flat" cmpd="sng" algn="ctr">
+                      <a:solidFill>
+                        <a:srgbClr val="C8D8E8"/>
+                      </a:solidFill>
+                      <a:prstDash val="solid"/>
+                      <a:round/>
+                      <a:headEnd type="none" w="med" len="med"/>
+                      <a:tailEnd type="none" w="med" len="med"/>
+                    </a:lnR>
+                    <a:lnT w="12700" cap="flat" cmpd="sng" algn="ctr">
+                      <a:solidFill>
+                        <a:srgbClr val="C8D8E8"/>
+                      </a:solidFill>
+                      <a:prstDash val="solid"/>
+                      <a:round/>
+                      <a:headEnd type="none" w="med" len="med"/>
+                      <a:tailEnd type="none" w="med" len="med"/>
+                    </a:lnT>
+                    <a:lnB w="12700" cap="flat" cmpd="sng" algn="ctr">
+                      <a:solidFill>
+                        <a:srgbClr val="C8D8E8"/>
+                      </a:solidFill>
+                      <a:prstDash val="solid"/>
+                      <a:round/>
+                      <a:headEnd type="none" w="med" len="med"/>
+                      <a:tailEnd type="none" w="med" len="med"/>
+                    </a:lnB>
+                  </a:tcPr>
+                </a:tc>
+                <a:tc>
+                  <a:txBody>
+                    <a:bodyPr/>
+                    <a:lstStyle/>
+                    <a:p>
+                      <a:pPr marL="0" indent="0" algn="ctr">
+                        <a:buNone/>
+                      </a:pPr>
+                      <a:r>
+                        <a:rPr lang="en-US" sz="1400" dirty="0">
+                          <a:latin typeface="Arial" charset="0"/>
+                          <a:ea typeface="Arial" charset="0"/>
+                          <a:cs typeface="Arial" charset="0"/>
+                        </a:rPr>
+                        <a:t>10.33</a:t>
+                      </a:r>
                     </a:p>
                   </a:txBody>
                   <a:tcPr>
@@ -11709,75 +11858,10 @@
                             <a:srgbClr val="1A2E4A"/>
                           </a:solidFill>
                           <a:latin typeface="Arial" pitchFamily="34" charset="0"/>
-                          <a:ea typeface="Arial" pitchFamily="34" charset="-122"/>
+                          <a:ea typeface="Arial" charset="0"/>
                           <a:cs typeface="Arial" pitchFamily="34" charset="-120"/>
                         </a:rPr>
-                        <a:t>Fill from notebook</a:t>
-                      </a:r>
-                      <a:endParaRPr lang="en-US" sz="1400" dirty="0">
-                        <a:latin typeface="Arial" charset="0"/>
-                        <a:ea typeface="Arial" charset="0"/>
-                        <a:cs typeface="Arial" charset="0"/>
-                      </a:endParaRPr>
-                    </a:p>
-                  </a:txBody>
-                  <a:tcPr>
-                    <a:lnL w="12700" cap="flat" cmpd="sng" algn="ctr">
-                      <a:solidFill>
-                        <a:srgbClr val="C8D8E8"/>
-                      </a:solidFill>
-                      <a:prstDash val="solid"/>
-                      <a:round/>
-                      <a:headEnd type="none" w="med" len="med"/>
-                      <a:tailEnd type="none" w="med" len="med"/>
-                    </a:lnL>
-                    <a:lnR w="12700" cap="flat" cmpd="sng" algn="ctr">
-                      <a:solidFill>
-                        <a:srgbClr val="C8D8E8"/>
-                      </a:solidFill>
-                      <a:prstDash val="solid"/>
-                      <a:round/>
-                      <a:headEnd type="none" w="med" len="med"/>
-                      <a:tailEnd type="none" w="med" len="med"/>
-                    </a:lnR>
-                    <a:lnT w="12700" cap="flat" cmpd="sng" algn="ctr">
-                      <a:solidFill>
-                        <a:srgbClr val="C8D8E8"/>
-                      </a:solidFill>
-                      <a:prstDash val="solid"/>
-                      <a:round/>
-                      <a:headEnd type="none" w="med" len="med"/>
-                      <a:tailEnd type="none" w="med" len="med"/>
-                    </a:lnT>
-                    <a:lnB w="12700" cap="flat" cmpd="sng" algn="ctr">
-                      <a:solidFill>
-                        <a:srgbClr val="C8D8E8"/>
-                      </a:solidFill>
-                      <a:prstDash val="solid"/>
-                      <a:round/>
-                      <a:headEnd type="none" w="med" len="med"/>
-                      <a:tailEnd type="none" w="med" len="med"/>
-                    </a:lnB>
-                  </a:tcPr>
-                </a:tc>
-                <a:tc>
-                  <a:txBody>
-                    <a:bodyPr/>
-                    <a:lstStyle/>
-                    <a:p>
-                      <a:pPr marL="0" indent="0" algn="ctr">
-                        <a:buNone/>
-                      </a:pPr>
-                      <a:r>
-                        <a:rPr lang="en-US" sz="1400" dirty="0">
-                          <a:solidFill>
-                            <a:srgbClr val="1A2E4A"/>
-                          </a:solidFill>
-                          <a:latin typeface="Arial" pitchFamily="34" charset="0"/>
-                          <a:ea typeface="Arial" pitchFamily="34" charset="-122"/>
-                          <a:cs typeface="Arial" pitchFamily="34" charset="-120"/>
-                        </a:rPr>
-                        <a:t>Fill from notebook ✅</a:t>
+                        <a:t>-0.19</a:t>
                       </a:r>
                       <a:endParaRPr lang="en-US" sz="1400" dirty="0">
                         <a:latin typeface="Arial" charset="0"/>
@@ -11911,10 +11995,10 @@
                             <a:srgbClr val="1A2E4A"/>
                           </a:solidFill>
                           <a:latin typeface="Arial" pitchFamily="34" charset="0"/>
-                          <a:ea typeface="Arial" pitchFamily="34" charset="-122"/>
+                          <a:ea typeface="Arial" charset="0"/>
                           <a:cs typeface="Arial" pitchFamily="34" charset="-120"/>
                         </a:rPr>
-                        <a:t>Fill from notebook</a:t>
+                        <a:t>9.71</a:t>
                       </a:r>
                       <a:endParaRPr lang="en-US" sz="1400" dirty="0">
                         <a:latin typeface="Arial" charset="0"/>
@@ -11976,10 +12060,10 @@
                             <a:srgbClr val="1A2E4A"/>
                           </a:solidFill>
                           <a:latin typeface="Arial" pitchFamily="34" charset="0"/>
-                          <a:ea typeface="Arial" pitchFamily="34" charset="-122"/>
+                          <a:ea typeface="Arial" charset="0"/>
                           <a:cs typeface="Arial" pitchFamily="34" charset="-120"/>
                         </a:rPr>
-                        <a:t>Fill from notebook</a:t>
+                        <a:t>11.87</a:t>
                       </a:r>
                       <a:endParaRPr lang="en-US" sz="1400" dirty="0">
                         <a:latin typeface="Arial" charset="0"/>
@@ -12041,10 +12125,10 @@
                             <a:srgbClr val="1A2E4A"/>
                           </a:solidFill>
                           <a:latin typeface="Arial" pitchFamily="34" charset="0"/>
-                          <a:ea typeface="Arial" pitchFamily="34" charset="-122"/>
+                          <a:ea typeface="Arial" charset="0"/>
                           <a:cs typeface="Arial" pitchFamily="34" charset="-120"/>
                         </a:rPr>
-                        <a:t>Fill from notebook</a:t>
+                        <a:t>-0.57</a:t>
                       </a:r>
                       <a:endParaRPr lang="en-US" sz="1400" dirty="0">
                         <a:latin typeface="Arial" charset="0"/>
@@ -12106,11 +12190,17 @@
         <p:nvGraphicFramePr>
           <p:cNvPr id="5" name="Chart 0"/>
           <p:cNvGraphicFramePr/>
-          <p:nvPr/>
+          <p:nvPr>
+            <p:extLst>
+              <p:ext uri="{D42A27DB-BD31-4B8C-83A1-F6EECF244321}">
+                <p14:modId xmlns:p14="http://schemas.microsoft.com/office/powerpoint/2010/main" val="3074258098"/>
+              </p:ext>
+            </p:extLst>
+          </p:nvPr>
         </p:nvGraphicFramePr>
         <p:xfrm>
           <a:off x="365760" y="3246120"/>
-          <a:ext cx="8412480" cy="1645920"/>
+          <a:ext cx="8412480" cy="1740408"/>
         </p:xfrm>
         <a:graphic>
           <a:graphicData uri="http://schemas.openxmlformats.org/drawingml/2006/chart">
